--- a/public/fun/pack/pptx/talkpro/발표템플릿프리미엄_02_교육·강의_블러시샴페인.pptx
+++ b/public/fun/pack/pptx/talkpro/발표템플릿프리미엄_02_교육·강의_블러시샴페인.pptx
@@ -115,12 +115,12 @@
   <p:extLst>
     <p:ext uri="{521415D9-36F7-43E2-AB2F-B90AF26B5E84}">
       <p14:sectionLst xmlns:p14="http://schemas.microsoft.com/office/powerpoint/2010/main">
-        <p14:section name="시작" id="{693E9B99-2913-40CF-895D-3392FCBB5238}">
+        <p14:section name="시작" id="{2D54642B-6942-4701-9952-30D1B9988095}">
           <p14:sldIdLst>
             <p14:sldId id="256"/>
           </p14:sldIdLst>
         </p14:section>
-        <p14:section name="본문" id="{357DE8B0-9EC3-4FF6-B045-7C3BDDE2A3B1}">
+        <p14:section name="본문" id="{D1495E9C-07B8-4A87-87EE-8001B35B766D}">
           <p14:sldIdLst>
             <p14:sldId id="257"/>
             <p14:sldId id="258"/>
@@ -131,7 +131,7 @@
             <p14:sldId id="263"/>
           </p14:sldIdLst>
         </p14:section>
-        <p14:section name="마무리" id="{2676D654-F1EC-493C-9361-9810572C8C2D}">
+        <p14:section name="마무리" id="{8BF9EEE2-4BB0-440D-9073-0D7DD0D4356C}">
           <p14:sldIdLst>
             <p14:sldId id="264"/>
           </p14:sldIdLst>
@@ -1828,7 +1828,7 @@
             </a:lvl1pPr>
           </a:lstStyle>
           <a:p>
-            <a:fld id="{7061CAC3-582A-470E-B2E1-FC92BB97DC0A}" type="slidenum">
+            <a:fld id="{040A003F-D677-4AE8-999A-94A891B1E722}" type="slidenum">
               <a:rPr lang="en-US"/>
               <a:t>‹#›</a:t>
             </a:fld>
@@ -2360,7 +2360,7 @@
             </a:lvl1pPr>
           </a:lstStyle>
           <a:p>
-            <a:fld id="{BC66CD7C-C43F-4201-950F-9DABB03C937B}" type="slidenum">
+            <a:fld id="{897AA8D9-B12D-4160-87F1-E0E91D7C7D48}" type="slidenum">
               <a:rPr lang="en-US"/>
               <a:t>‹#›</a:t>
             </a:fld>
@@ -2949,7 +2949,7 @@
             </a:lvl1pPr>
           </a:lstStyle>
           <a:p>
-            <a:fld id="{23021FE0-93B5-4DE3-A1CD-6C186A043327}" type="slidenum">
+            <a:fld id="{6E57CA25-887E-4F49-A828-1948BF49E7D1}" type="slidenum">
               <a:rPr lang="en-US"/>
               <a:t>‹#›</a:t>
             </a:fld>
@@ -3758,7 +3758,7 @@
           <a:p>
             <a:r>
               <a:rPr lang="ko-KR"/>
-              <a:t>0000. 00. 00</a:t>
+              <a:t>날짜 입력</a:t>
             </a:r>
           </a:p>
         </p:txBody>
@@ -3843,7 +3843,7 @@
           <a:bodyPr/>
           <a:lstStyle/>
           <a:p>
-            <a:fld id="{09B466B2-01EE-459C-9667-852A2B4E6111}" type="slidenum">
+            <a:fld id="{B654ED1D-4180-4263-920A-AC00E2A05A4C}" type="slidenum">
               <a:rPr lang="en-US"/>
               <a:t>‹#›</a:t>
             </a:fld>
@@ -4945,7 +4945,7 @@
           <a:bodyPr/>
           <a:lstStyle/>
           <a:p>
-            <a:fld id="{7E58293C-8F2E-4EFF-A7BA-35FBB4E79A5A}" type="slidenum">
+            <a:fld id="{516A1A0B-C5B8-4F75-9C8B-A0CB3277BC4D}" type="slidenum">
               <a:rPr lang="en-US"/>
               <a:t>‹#›</a:t>
             </a:fld>
@@ -5033,7 +5033,7 @@
           <a:bodyPr/>
           <a:lstStyle/>
           <a:p>
-            <a:fld id="{072888F1-4319-4265-905E-AD5DC41D148F}" type="slidenum">
+            <a:fld id="{7F4B5660-1683-44C1-A2A4-57990DA92969}" type="slidenum">
               <a:rPr lang="en-US"/>
               <a:t>‹#›</a:t>
             </a:fld>
@@ -5931,7 +5931,7 @@
           <a:bodyPr/>
           <a:lstStyle/>
           <a:p>
-            <a:fld id="{02ED4894-9EE3-4315-9486-EF859B2E2E08}" type="slidenum">
+            <a:fld id="{29B7DBCB-7334-40D3-A48D-56BB00154FDD}" type="slidenum">
               <a:rPr lang="en-US"/>
               <a:t>‹#›</a:t>
             </a:fld>
@@ -6529,7 +6529,7 @@
           <a:bodyPr/>
           <a:lstStyle/>
           <a:p>
-            <a:fld id="{763FA9C8-911A-46F4-97DC-26829E76DE83}" type="slidenum">
+            <a:fld id="{DED16A93-B0A5-47EC-8458-C4DD10DEF467}" type="slidenum">
               <a:rPr lang="en-US"/>
               <a:t>‹#›</a:t>
             </a:fld>
@@ -6712,7 +6712,7 @@
           <a:bodyPr/>
           <a:lstStyle/>
           <a:p>
-            <a:fld id="{462E8A9C-56C9-4471-8B3A-EB126EC0D416}" type="slidenum">
+            <a:fld id="{5FDFA711-8EFD-40DA-A51F-26BD4D3AE4B4}" type="slidenum">
               <a:rPr lang="en-US"/>
               <a:t>‹#›</a:t>
             </a:fld>
@@ -7776,7 +7776,7 @@
           <a:bodyPr/>
           <a:lstStyle/>
           <a:p>
-            <a:fld id="{9C2F2738-9284-455D-94DA-FE0AE13CCA81}" type="slidenum">
+            <a:fld id="{1A4673CE-A8CD-4C0E-BF36-C2D21C1F2EF0}" type="slidenum">
               <a:rPr lang="en-US"/>
               <a:t>‹#›</a:t>
             </a:fld>
